--- a/dist/초5/수학/도형과측정/초5_수학_도형과측정_03_선대칭과점대칭_학생용.pptx
+++ b/dist/초5/수학/도형과측정/초5_수학_도형과측정_03_선대칭과점대칭_학생용.pptx
@@ -120,13 +120,13 @@
   <p:extLst>
     <p:ext uri="{521415D9-36F7-43E2-AB2F-B90AF26B5E84}">
       <p14:sectionLst xmlns:p14="http://schemas.microsoft.com/office/powerpoint/2010/main">
-        <p14:section name="도입" id="{e1890cff-868e-433e-e8aa-22bf9a149048}">
+        <p14:section name="도입" id="{b15e4147-bb58-8086-a5c2-cd872f3652c8}">
           <p14:sldIdLst>
             <p14:sldId id="256"/>
             <p14:sldId id="257"/>
           </p14:sldIdLst>
         </p14:section>
-        <p14:section name="개념" id="{e45de02e-dca4-0adf-9091-cbfdc6f1ec86}">
+        <p14:section name="개념" id="{c45b6401-aa63-9913-9883-9727a232bc4a}">
           <p14:sldIdLst>
             <p14:sldId id="258"/>
             <p14:sldId id="259"/>
@@ -135,37 +135,37 @@
             <p14:sldId id="264"/>
           </p14:sldIdLst>
         </p14:section>
-        <p14:section name="연습" id="{ad86c148-f1e1-975e-384c-c28c6ecd3c9e}">
+        <p14:section name="연습" id="{bb9e9bcd-c60b-edef-144b-b242776a87d2}">
           <p14:sldIdLst>
             <p14:sldId id="260"/>
             <p14:sldId id="262"/>
             <p14:sldId id="265"/>
           </p14:sldIdLst>
         </p14:section>
-        <p14:section name="개념" id="{b235ae1c-264d-cc3d-0155-a1df107999be}">
+        <p14:section name="개념" id="{d1688b54-52f8-f240-7879-6ace80ccc111}">
           <p14:sldIdLst/>
         </p14:section>
-        <p14:section name="연습" id="{6f7da10c-bafc-bdb4-b400-0ac314496473}">
+        <p14:section name="연습" id="{4df2e960-f9bb-5ac8-eff4-669a34f4c858}">
           <p14:sldIdLst/>
         </p14:section>
-        <p14:section name="개념" id="{7e572c53-536e-e9ff-1735-6bd4a802631d}">
+        <p14:section name="개념" id="{04709a44-5464-85fa-c542-6261342220c8}">
           <p14:sldIdLst/>
         </p14:section>
-        <p14:section name="연습" id="{4142f4c5-ad2d-92ff-efad-813faf47f03e}">
+        <p14:section name="연습" id="{7a6e674e-e1af-cda3-5071-3678bbb0585c}">
           <p14:sldIdLst/>
         </p14:section>
-        <p14:section name="확인" id="{4cb09ab6-e021-b7b8-27ac-a906d660efbe}">
+        <p14:section name="확인" id="{9fb6fcc7-6ce4-8386-e9d1-135e5b2c78ed}">
           <p14:sldIdLst>
             <p14:sldId id="266"/>
             <p14:sldId id="267"/>
           </p14:sldIdLst>
         </p14:section>
-        <p14:section name="정리" id="{f9bc85a2-2271-1729-5a3a-e23fbb92a3ee}">
+        <p14:section name="정리" id="{e9d6ac7a-1afb-ad0b-a460-37ac6a4909af}">
           <p14:sldIdLst>
             <p14:sldId id="268"/>
           </p14:sldIdLst>
         </p14:section>
-        <p14:section name="보충" id="{59007253-73ec-6d38-4ade-369c2d47262c}">
+        <p14:section name="보충" id="{e0f7ecb1-f2a2-e613-c60e-a1b374d33d8a}">
           <p14:sldIdLst>
             <p14:sldId id="269"/>
           </p14:sldIdLst>
@@ -4485,7 +4485,7 @@
         </p:nvSpPr>
         <p:spPr>
           <a:xfrm>
-            <a:off x="1451102" y="3434207"/>
+            <a:off x="1384046" y="3434207"/>
             <a:ext cx="483108" cy="476250"/>
           </a:xfrm>
           <a:prstGeom prst="rect">
@@ -5245,7 +5245,7 @@
         </p:nvSpPr>
         <p:spPr>
           <a:xfrm>
-            <a:off x="7322630" y="3434207"/>
+            <a:off x="7255574" y="3434207"/>
             <a:ext cx="483108" cy="476250"/>
           </a:xfrm>
           <a:prstGeom prst="rect">
@@ -5284,7 +5284,7 @@
         </p:nvSpPr>
         <p:spPr>
           <a:xfrm>
-            <a:off x="8540179" y="3326384"/>
+            <a:off x="8540179" y="3393440"/>
             <a:ext cx="483108" cy="476250"/>
           </a:xfrm>
           <a:prstGeom prst="rect">
@@ -7156,7 +7156,7 @@
         </p:nvSpPr>
         <p:spPr>
           <a:xfrm>
-            <a:off x="2254529" y="1529189"/>
+            <a:off x="2236630" y="1464567"/>
             <a:ext cx="483108" cy="476250"/>
           </a:xfrm>
           <a:prstGeom prst="rect">
@@ -7195,7 +7195,7 @@
         </p:nvSpPr>
         <p:spPr>
           <a:xfrm>
-            <a:off x="1680814" y="3710956"/>
+            <a:off x="1627960" y="3752223"/>
             <a:ext cx="483108" cy="476250"/>
           </a:xfrm>
           <a:prstGeom prst="rect">
@@ -7234,7 +7234,7 @@
         </p:nvSpPr>
         <p:spPr>
           <a:xfrm>
-            <a:off x="4349500" y="3658936"/>
+            <a:off x="4411451" y="3684598"/>
             <a:ext cx="483108" cy="476250"/>
           </a:xfrm>
           <a:prstGeom prst="rect">
@@ -7492,7 +7492,7 @@
         </p:nvSpPr>
         <p:spPr>
           <a:xfrm>
-            <a:off x="9451315" y="1529189"/>
+            <a:off x="9469214" y="1464567"/>
             <a:ext cx="483108" cy="476250"/>
           </a:xfrm>
           <a:prstGeom prst="rect">
@@ -7531,7 +7531,7 @@
         </p:nvSpPr>
         <p:spPr>
           <a:xfrm>
-            <a:off x="10025030" y="3710956"/>
+            <a:off x="10077884" y="3752223"/>
             <a:ext cx="483108" cy="476250"/>
           </a:xfrm>
           <a:prstGeom prst="rect">
@@ -7570,7 +7570,7 @@
         </p:nvSpPr>
         <p:spPr>
           <a:xfrm>
-            <a:off x="7356344" y="3658936"/>
+            <a:off x="7294393" y="3684598"/>
             <a:ext cx="483108" cy="476250"/>
           </a:xfrm>
           <a:prstGeom prst="rect">
@@ -8356,7 +8356,7 @@
         </p:nvSpPr>
         <p:spPr>
           <a:xfrm>
-            <a:off x="8717280" y="3757295"/>
+            <a:off x="8717280" y="3824351"/>
             <a:ext cx="483108" cy="476250"/>
           </a:xfrm>
           <a:prstGeom prst="rect">
@@ -9356,8 +9356,8 @@
         </p:nvSpPr>
         <p:spPr>
           <a:xfrm>
-            <a:off x="1447038" y="2286000"/>
-            <a:ext cx="3566160" cy="2971800"/>
+            <a:off x="1562688" y="2382375"/>
+            <a:ext cx="3334860" cy="2779050"/>
           </a:xfrm>
           <a:custGeom>
             <a:avLst/>
@@ -9366,21 +9366,21 @@
             <a:cxnLst/>
             <a:rect l="l" t="t" r="r" b="b"/>
             <a:pathLst>
-              <a:path w="3566160" h="2971800">
+              <a:path w="3334860" h="2779050">
                 <a:moveTo>
-                  <a:pt x="1783080" y="0"/>
+                  <a:pt x="1667430" y="0"/>
                 </a:moveTo>
                 <a:lnTo>
-                  <a:pt x="0" y="1188720"/>
-                </a:lnTo>
-                <a:lnTo>
-                  <a:pt x="594360" y="2971800"/>
-                </a:lnTo>
-                <a:lnTo>
-                  <a:pt x="2971800" y="2971800"/>
-                </a:lnTo>
-                <a:lnTo>
-                  <a:pt x="3566160" y="1188720"/>
+                  <a:pt x="0" y="1111620"/>
+                </a:lnTo>
+                <a:lnTo>
+                  <a:pt x="555810" y="2779050"/>
+                </a:lnTo>
+                <a:lnTo>
+                  <a:pt x="2779050" y="2779050"/>
+                </a:lnTo>
+                <a:lnTo>
+                  <a:pt x="3334860" y="1111620"/>
                 </a:lnTo>
                 <a:close/>
               </a:path>
@@ -9405,7 +9405,7 @@
         </p:nvSpPr>
         <p:spPr>
           <a:xfrm>
-            <a:off x="1926538" y="4894587"/>
+            <a:off x="2003638" y="4798212"/>
             <a:ext cx="478080" cy="363213"/>
           </a:xfrm>
           <a:custGeom>
@@ -9512,7 +9512,7 @@
         </p:nvSpPr>
         <p:spPr>
           <a:xfrm>
-            <a:off x="4055618" y="4894587"/>
+            <a:off x="3978518" y="4798212"/>
             <a:ext cx="478080" cy="363213"/>
           </a:xfrm>
           <a:custGeom>
@@ -9619,7 +9619,7 @@
         </p:nvSpPr>
         <p:spPr>
           <a:xfrm>
-            <a:off x="3230118" y="3265170"/>
+            <a:off x="3230118" y="3284445"/>
             <a:ext cx="209550" cy="209550"/>
           </a:xfrm>
           <a:custGeom>
@@ -9659,8 +9659,8 @@
         </p:nvSpPr>
         <p:spPr>
           <a:xfrm flipV="1">
-            <a:off x="3230118" y="1691640"/>
-            <a:ext cx="0" cy="4160520"/>
+            <a:off x="3230118" y="1826565"/>
+            <a:ext cx="0" cy="3890670"/>
           </a:xfrm>
           <a:prstGeom prst="line">
             <a:avLst/>
@@ -9682,8 +9682,8 @@
         </p:nvSpPr>
         <p:spPr>
           <a:xfrm>
-            <a:off x="1447038" y="3474720"/>
-            <a:ext cx="1783080" cy="0"/>
+            <a:off x="1562688" y="3493995"/>
+            <a:ext cx="1667430" cy="0"/>
           </a:xfrm>
           <a:prstGeom prst="line">
             <a:avLst/>
@@ -9705,8 +9705,8 @@
         </p:nvSpPr>
         <p:spPr>
           <a:xfrm>
-            <a:off x="3230118" y="3474720"/>
-            <a:ext cx="1783080" cy="0"/>
+            <a:off x="3230118" y="3493995"/>
+            <a:ext cx="1667430" cy="0"/>
           </a:xfrm>
           <a:prstGeom prst="line">
             <a:avLst/>
@@ -9728,7 +9728,7 @@
         </p:nvSpPr>
         <p:spPr>
           <a:xfrm>
-            <a:off x="2324630" y="2788920"/>
+            <a:off x="2382454" y="2846745"/>
             <a:ext cx="92990" cy="139485"/>
           </a:xfrm>
           <a:prstGeom prst="line">
@@ -9751,7 +9751,7 @@
         </p:nvSpPr>
         <p:spPr>
           <a:xfrm>
-            <a:off x="2259537" y="2832315"/>
+            <a:off x="2317361" y="2890140"/>
             <a:ext cx="92990" cy="139485"/>
           </a:xfrm>
           <a:prstGeom prst="line">
@@ -9774,7 +9774,7 @@
         </p:nvSpPr>
         <p:spPr>
           <a:xfrm flipV="1">
-            <a:off x="1664699" y="4339754"/>
+            <a:off x="1761074" y="4301204"/>
             <a:ext cx="159037" cy="53012"/>
           </a:xfrm>
           <a:prstGeom prst="line">
@@ -9797,7 +9797,7 @@
         </p:nvSpPr>
         <p:spPr>
           <a:xfrm flipH="1" flipV="1">
-            <a:off x="4636499" y="4339754"/>
+            <a:off x="4540125" y="4301204"/>
             <a:ext cx="159037" cy="53012"/>
           </a:xfrm>
           <a:prstGeom prst="line">
@@ -9820,7 +9820,7 @@
         </p:nvSpPr>
         <p:spPr>
           <a:xfrm flipH="1">
-            <a:off x="4107710" y="2832315"/>
+            <a:off x="4049885" y="2890140"/>
             <a:ext cx="92990" cy="139485"/>
           </a:xfrm>
           <a:prstGeom prst="line">
@@ -9843,7 +9843,7 @@
         </p:nvSpPr>
         <p:spPr>
           <a:xfrm flipH="1">
-            <a:off x="4042617" y="2788920"/>
+            <a:off x="3984792" y="2846745"/>
             <a:ext cx="92990" cy="139485"/>
           </a:xfrm>
           <a:prstGeom prst="line">
@@ -9866,7 +9866,7 @@
         </p:nvSpPr>
         <p:spPr>
           <a:xfrm>
-            <a:off x="1956816" y="3551555"/>
+            <a:off x="2014641" y="3570830"/>
             <a:ext cx="763524" cy="349250"/>
           </a:xfrm>
           <a:prstGeom prst="rect">
@@ -9905,7 +9905,7 @@
         </p:nvSpPr>
         <p:spPr>
           <a:xfrm>
-            <a:off x="3739896" y="3551555"/>
+            <a:off x="3682071" y="3570830"/>
             <a:ext cx="763524" cy="349250"/>
           </a:xfrm>
           <a:prstGeom prst="rect">
@@ -9944,7 +9944,7 @@
         </p:nvSpPr>
         <p:spPr>
           <a:xfrm>
-            <a:off x="3146617" y="1889822"/>
+            <a:off x="3194032" y="1938782"/>
             <a:ext cx="483108" cy="476250"/>
           </a:xfrm>
           <a:prstGeom prst="rect">
@@ -9983,7 +9983,7 @@
         </p:nvSpPr>
         <p:spPr>
           <a:xfrm>
-            <a:off x="985631" y="3196275"/>
+            <a:off x="1035324" y="3203454"/>
             <a:ext cx="483108" cy="476250"/>
           </a:xfrm>
           <a:prstGeom prst="rect">
@@ -10022,7 +10022,7 @@
         </p:nvSpPr>
         <p:spPr>
           <a:xfrm>
-            <a:off x="1669150" y="5201004"/>
+            <a:off x="1707041" y="5159028"/>
             <a:ext cx="483108" cy="476250"/>
           </a:xfrm>
           <a:prstGeom prst="rect">
@@ -10061,7 +10061,7 @@
         </p:nvSpPr>
         <p:spPr>
           <a:xfrm>
-            <a:off x="4307978" y="5201004"/>
+            <a:off x="4270087" y="5159028"/>
             <a:ext cx="483108" cy="476250"/>
           </a:xfrm>
           <a:prstGeom prst="rect">
@@ -10100,7 +10100,7 @@
         </p:nvSpPr>
         <p:spPr>
           <a:xfrm>
-            <a:off x="4991497" y="3196275"/>
+            <a:off x="4941804" y="3203454"/>
             <a:ext cx="483108" cy="476250"/>
           </a:xfrm>
           <a:prstGeom prst="rect">
@@ -10139,7 +10139,7 @@
         </p:nvSpPr>
         <p:spPr>
           <a:xfrm>
-            <a:off x="2830511" y="3078542"/>
+            <a:off x="2783096" y="3050402"/>
             <a:ext cx="483108" cy="476250"/>
           </a:xfrm>
           <a:prstGeom prst="rect">
@@ -11059,8 +11059,8 @@
         </p:nvSpPr>
         <p:spPr>
           <a:xfrm flipV="1">
-            <a:off x="7310445" y="1687068"/>
-            <a:ext cx="0" cy="3072384"/>
+            <a:off x="7357471" y="1728216"/>
+            <a:ext cx="0" cy="2990088"/>
           </a:xfrm>
           <a:prstGeom prst="line">
             <a:avLst/>
@@ -11082,8 +11082,8 @@
         </p:nvSpPr>
         <p:spPr>
           <a:xfrm flipV="1">
-            <a:off x="7749357" y="1687068"/>
-            <a:ext cx="0" cy="3072384"/>
+            <a:off x="7784627" y="1728216"/>
+            <a:ext cx="0" cy="2990088"/>
           </a:xfrm>
           <a:prstGeom prst="line">
             <a:avLst/>
@@ -11105,8 +11105,8 @@
         </p:nvSpPr>
         <p:spPr>
           <a:xfrm flipV="1">
-            <a:off x="8188269" y="1687068"/>
-            <a:ext cx="0" cy="3072384"/>
+            <a:off x="8211782" y="1728216"/>
+            <a:ext cx="0" cy="2990088"/>
           </a:xfrm>
           <a:prstGeom prst="line">
             <a:avLst/>
@@ -11128,8 +11128,8 @@
         </p:nvSpPr>
         <p:spPr>
           <a:xfrm flipV="1">
-            <a:off x="8627181" y="1687068"/>
-            <a:ext cx="0" cy="3072384"/>
+            <a:off x="8638938" y="1728216"/>
+            <a:ext cx="0" cy="2990088"/>
           </a:xfrm>
           <a:prstGeom prst="line">
             <a:avLst/>
@@ -11151,8 +11151,8 @@
         </p:nvSpPr>
         <p:spPr>
           <a:xfrm flipV="1">
-            <a:off x="9066093" y="1687068"/>
-            <a:ext cx="0" cy="3072384"/>
+            <a:off x="9066093" y="1728216"/>
+            <a:ext cx="0" cy="2990088"/>
           </a:xfrm>
           <a:prstGeom prst="line">
             <a:avLst/>
@@ -11174,8 +11174,8 @@
         </p:nvSpPr>
         <p:spPr>
           <a:xfrm flipV="1">
-            <a:off x="9505005" y="1687068"/>
-            <a:ext cx="0" cy="3072384"/>
+            <a:off x="9493249" y="1728216"/>
+            <a:ext cx="0" cy="2990088"/>
           </a:xfrm>
           <a:prstGeom prst="line">
             <a:avLst/>
@@ -11197,8 +11197,8 @@
         </p:nvSpPr>
         <p:spPr>
           <a:xfrm flipV="1">
-            <a:off x="9943917" y="1687068"/>
-            <a:ext cx="0" cy="3072384"/>
+            <a:off x="9920404" y="1728216"/>
+            <a:ext cx="0" cy="2990088"/>
           </a:xfrm>
           <a:prstGeom prst="line">
             <a:avLst/>
@@ -11220,8 +11220,8 @@
         </p:nvSpPr>
         <p:spPr>
           <a:xfrm flipV="1">
-            <a:off x="10382829" y="1687068"/>
-            <a:ext cx="0" cy="3072384"/>
+            <a:off x="10347559" y="1728216"/>
+            <a:ext cx="0" cy="2990088"/>
           </a:xfrm>
           <a:prstGeom prst="line">
             <a:avLst/>
@@ -11243,8 +11243,8 @@
         </p:nvSpPr>
         <p:spPr>
           <a:xfrm flipV="1">
-            <a:off x="10821741" y="1687068"/>
-            <a:ext cx="0" cy="3072384"/>
+            <a:off x="10774715" y="1728216"/>
+            <a:ext cx="0" cy="2990088"/>
           </a:xfrm>
           <a:prstGeom prst="line">
             <a:avLst/>
@@ -11266,8 +11266,8 @@
         </p:nvSpPr>
         <p:spPr>
           <a:xfrm>
-            <a:off x="7310445" y="4759452"/>
-            <a:ext cx="3511296" cy="0"/>
+            <a:off x="7357471" y="4718304"/>
+            <a:ext cx="3417243" cy="0"/>
           </a:xfrm>
           <a:prstGeom prst="line">
             <a:avLst/>
@@ -11289,8 +11289,8 @@
         </p:nvSpPr>
         <p:spPr>
           <a:xfrm>
-            <a:off x="7310445" y="4320540"/>
-            <a:ext cx="3511296" cy="0"/>
+            <a:off x="7357471" y="4291149"/>
+            <a:ext cx="3417243" cy="0"/>
           </a:xfrm>
           <a:prstGeom prst="line">
             <a:avLst/>
@@ -11312,8 +11312,8 @@
         </p:nvSpPr>
         <p:spPr>
           <a:xfrm>
-            <a:off x="7310445" y="3881628"/>
-            <a:ext cx="3511296" cy="0"/>
+            <a:off x="7357471" y="3863993"/>
+            <a:ext cx="3417243" cy="0"/>
           </a:xfrm>
           <a:prstGeom prst="line">
             <a:avLst/>
@@ -11335,8 +11335,8 @@
         </p:nvSpPr>
         <p:spPr>
           <a:xfrm>
-            <a:off x="7310445" y="3442716"/>
-            <a:ext cx="3511296" cy="0"/>
+            <a:off x="7357471" y="3436838"/>
+            <a:ext cx="3417243" cy="0"/>
           </a:xfrm>
           <a:prstGeom prst="line">
             <a:avLst/>
@@ -11358,8 +11358,8 @@
         </p:nvSpPr>
         <p:spPr>
           <a:xfrm>
-            <a:off x="7310445" y="3003804"/>
-            <a:ext cx="3511296" cy="0"/>
+            <a:off x="7357471" y="3009682"/>
+            <a:ext cx="3417243" cy="0"/>
           </a:xfrm>
           <a:prstGeom prst="line">
             <a:avLst/>
@@ -11381,8 +11381,8 @@
         </p:nvSpPr>
         <p:spPr>
           <a:xfrm>
-            <a:off x="7310445" y="2564892"/>
-            <a:ext cx="3511296" cy="0"/>
+            <a:off x="7357471" y="2582527"/>
+            <a:ext cx="3417243" cy="0"/>
           </a:xfrm>
           <a:prstGeom prst="line">
             <a:avLst/>
@@ -11404,8 +11404,8 @@
         </p:nvSpPr>
         <p:spPr>
           <a:xfrm>
-            <a:off x="7310445" y="2125980"/>
-            <a:ext cx="3511296" cy="0"/>
+            <a:off x="7357471" y="2155371"/>
+            <a:ext cx="3417243" cy="0"/>
           </a:xfrm>
           <a:prstGeom prst="line">
             <a:avLst/>
@@ -11427,8 +11427,8 @@
         </p:nvSpPr>
         <p:spPr>
           <a:xfrm>
-            <a:off x="7310445" y="1687068"/>
-            <a:ext cx="3511296" cy="0"/>
+            <a:off x="7357471" y="1728216"/>
+            <a:ext cx="3417243" cy="0"/>
           </a:xfrm>
           <a:prstGeom prst="line">
             <a:avLst/>
@@ -11450,8 +11450,8 @@
         </p:nvSpPr>
         <p:spPr>
           <a:xfrm>
-            <a:off x="7749357" y="2125980"/>
-            <a:ext cx="1316736" cy="2194560"/>
+            <a:off x="7784627" y="2155371"/>
+            <a:ext cx="1281466" cy="2135777"/>
           </a:xfrm>
           <a:custGeom>
             <a:avLst/>
@@ -11460,24 +11460,24 @@
             <a:cxnLst/>
             <a:rect l="l" t="t" r="r" b="b"/>
             <a:pathLst>
-              <a:path w="1316736" h="2194560">
+              <a:path w="1281466" h="2135777">
                 <a:moveTo>
-                  <a:pt x="1316736" y="0"/>
+                  <a:pt x="1281466" y="0"/>
                 </a:moveTo>
                 <a:lnTo>
-                  <a:pt x="438912" y="0"/>
-                </a:lnTo>
-                <a:lnTo>
-                  <a:pt x="877824" y="877824"/>
-                </a:lnTo>
-                <a:lnTo>
-                  <a:pt x="0" y="1755648"/>
-                </a:lnTo>
-                <a:lnTo>
-                  <a:pt x="877824" y="2194560"/>
-                </a:lnTo>
-                <a:lnTo>
-                  <a:pt x="1316736" y="2194560"/>
+                  <a:pt x="427155" y="0"/>
+                </a:lnTo>
+                <a:lnTo>
+                  <a:pt x="854311" y="854311"/>
+                </a:lnTo>
+                <a:lnTo>
+                  <a:pt x="0" y="1708622"/>
+                </a:lnTo>
+                <a:lnTo>
+                  <a:pt x="854311" y="2135777"/>
+                </a:lnTo>
+                <a:lnTo>
+                  <a:pt x="1281466" y="2135777"/>
                 </a:lnTo>
               </a:path>
             </a:pathLst>
@@ -11499,8 +11499,8 @@
         </p:nvSpPr>
         <p:spPr>
           <a:xfrm>
-            <a:off x="9066093" y="2125980"/>
-            <a:ext cx="1316736" cy="2194560"/>
+            <a:off x="9066093" y="2155371"/>
+            <a:ext cx="1281466" cy="2135777"/>
           </a:xfrm>
           <a:custGeom>
             <a:avLst/>
@@ -11509,24 +11509,24 @@
             <a:cxnLst/>
             <a:rect l="l" t="t" r="r" b="b"/>
             <a:pathLst>
-              <a:path w="1316736" h="2194560">
+              <a:path w="1281466" h="2135777">
                 <a:moveTo>
                   <a:pt x="0" y="0"/>
                 </a:moveTo>
                 <a:lnTo>
-                  <a:pt x="877824" y="0"/>
-                </a:lnTo>
-                <a:lnTo>
-                  <a:pt x="438912" y="877824"/>
-                </a:lnTo>
-                <a:lnTo>
-                  <a:pt x="1316736" y="1755648"/>
-                </a:lnTo>
-                <a:lnTo>
-                  <a:pt x="438912" y="2194560"/>
-                </a:lnTo>
-                <a:lnTo>
-                  <a:pt x="0" y="2194560"/>
+                  <a:pt x="854311" y="0"/>
+                </a:lnTo>
+                <a:lnTo>
+                  <a:pt x="427155" y="854311"/>
+                </a:lnTo>
+                <a:lnTo>
+                  <a:pt x="1281466" y="1708622"/>
+                </a:lnTo>
+                <a:lnTo>
+                  <a:pt x="427155" y="2135777"/>
+                </a:lnTo>
+                <a:lnTo>
+                  <a:pt x="0" y="2135777"/>
                 </a:lnTo>
               </a:path>
             </a:pathLst>
@@ -11548,8 +11548,8 @@
         </p:nvSpPr>
         <p:spPr>
           <a:xfrm flipV="1">
-            <a:off x="9066093" y="1687068"/>
-            <a:ext cx="0" cy="3072384"/>
+            <a:off x="9066093" y="1728216"/>
+            <a:ext cx="0" cy="2990088"/>
           </a:xfrm>
           <a:prstGeom prst="line">
             <a:avLst/>
@@ -11571,8 +11571,8 @@
         </p:nvSpPr>
         <p:spPr>
           <a:xfrm>
-            <a:off x="7749357" y="3881628"/>
-            <a:ext cx="1316736" cy="0"/>
+            <a:off x="7784627" y="3863993"/>
+            <a:ext cx="1281466" cy="0"/>
           </a:xfrm>
           <a:prstGeom prst="line">
             <a:avLst/>
@@ -11594,8 +11594,8 @@
         </p:nvSpPr>
         <p:spPr>
           <a:xfrm>
-            <a:off x="9066093" y="3881628"/>
-            <a:ext cx="1316736" cy="0"/>
+            <a:off x="9066093" y="3863993"/>
+            <a:ext cx="1281466" cy="0"/>
           </a:xfrm>
           <a:prstGeom prst="line">
             <a:avLst/>
@@ -11617,7 +11617,7 @@
         </p:nvSpPr>
         <p:spPr>
           <a:xfrm>
-            <a:off x="8123753" y="3455543"/>
+            <a:off x="8141388" y="3437908"/>
             <a:ext cx="567944" cy="349250"/>
           </a:xfrm>
           <a:prstGeom prst="rect">
@@ -11656,7 +11656,7 @@
         </p:nvSpPr>
         <p:spPr>
           <a:xfrm>
-            <a:off x="9440489" y="3455543"/>
+            <a:off x="9422854" y="3437908"/>
             <a:ext cx="567944" cy="349250"/>
           </a:xfrm>
           <a:prstGeom prst="rect">
@@ -11695,7 +11695,7 @@
         </p:nvSpPr>
         <p:spPr>
           <a:xfrm>
-            <a:off x="7689921" y="3822192"/>
+            <a:off x="7725191" y="3804557"/>
             <a:ext cx="118872" cy="118872"/>
           </a:xfrm>
           <a:prstGeom prst="ellipse">
@@ -11720,7 +11720,7 @@
         </p:nvSpPr>
         <p:spPr>
           <a:xfrm>
-            <a:off x="10323393" y="3822192"/>
+            <a:off x="10288123" y="3804557"/>
             <a:ext cx="118872" cy="118872"/>
           </a:xfrm>
           <a:prstGeom prst="ellipse">
@@ -11745,7 +11745,7 @@
         </p:nvSpPr>
         <p:spPr>
           <a:xfrm>
-            <a:off x="7284283" y="3643503"/>
+            <a:off x="7252497" y="3625868"/>
             <a:ext cx="483108" cy="476250"/>
           </a:xfrm>
           <a:prstGeom prst="rect">
@@ -13518,7 +13518,7 @@
         </p:nvSpPr>
         <p:spPr>
           <a:xfrm>
-            <a:off x="3146617" y="3691828"/>
+            <a:off x="3194032" y="3739243"/>
             <a:ext cx="483108" cy="476250"/>
           </a:xfrm>
           <a:prstGeom prst="rect">
@@ -14545,7 +14545,7 @@
         </p:nvSpPr>
         <p:spPr>
           <a:xfrm>
-            <a:off x="7268471" y="1730988"/>
+            <a:off x="7221055" y="1683572"/>
             <a:ext cx="483108" cy="476250"/>
           </a:xfrm>
           <a:prstGeom prst="rect">
@@ -14584,7 +14584,7 @@
         </p:nvSpPr>
         <p:spPr>
           <a:xfrm>
-            <a:off x="8982592" y="2662998"/>
+            <a:off x="9030007" y="2615583"/>
             <a:ext cx="483108" cy="476250"/>
           </a:xfrm>
           <a:prstGeom prst="rect">
